--- a/output/test_notes_single_slide_deck/Python_Scripting_Python.pptx
+++ b/output/test_notes_single_slide_deck/Python_Scripting_Python.pptx
@@ -138,8 +138,8 @@
         </p:nvSpPr>
         <p:spPr>
           <a:xfrm>
-            <a:off x="685800" y="2130425"/>
-            <a:ext cx="7772400" cy="1470025"/>
+            <a:off x="1371600" y="1828800"/>
+            <a:ext cx="9445752" cy="1645920"/>
           </a:xfrm>
         </p:spPr>
         <p:txBody>
@@ -166,8 +166,8 @@
         </p:nvSpPr>
         <p:spPr>
           <a:xfrm>
-            <a:off x="1371600" y="3886200"/>
-            <a:ext cx="6400800" cy="1752600"/>
+            <a:off x="1371600" y="3840480"/>
+            <a:ext cx="9445752" cy="1097280"/>
           </a:xfrm>
         </p:spPr>
         <p:txBody>
@@ -306,7 +306,12 @@
             <p:ph type="ftr" sz="quarter" idx="11"/>
           </p:nvPr>
         </p:nvSpPr>
-        <p:spPr/>
+        <p:spPr>
+          <a:xfrm>
+            <a:off x="1371600" y="6217920"/>
+            <a:ext cx="8229600" cy="320040"/>
+          </a:xfrm>
+        </p:spPr>
         <p:txBody>
           <a:bodyPr/>
           <a:lstStyle/>
@@ -728,7 +733,12 @@
             <p:ph type="title"/>
           </p:nvPr>
         </p:nvSpPr>
-        <p:spPr/>
+        <p:spPr>
+          <a:xfrm>
+            <a:off x="1371600" y="950976"/>
+            <a:ext cx="9445752" cy="640080"/>
+          </a:xfrm>
+        </p:spPr>
         <p:txBody>
           <a:bodyPr/>
           <a:lstStyle/>
@@ -751,7 +761,12 @@
             <p:ph idx="1"/>
           </p:nvPr>
         </p:nvSpPr>
-        <p:spPr/>
+        <p:spPr>
+          <a:xfrm>
+            <a:off x="1371600" y="1709928"/>
+            <a:ext cx="9445752" cy="4297680"/>
+          </a:xfrm>
+        </p:spPr>
         <p:txBody>
           <a:bodyPr/>
           <a:lstStyle/>
@@ -826,7 +841,12 @@
             <p:ph type="ftr" sz="quarter" idx="11"/>
           </p:nvPr>
         </p:nvSpPr>
-        <p:spPr/>
+        <p:spPr>
+          <a:xfrm>
+            <a:off x="1371600" y="6217920"/>
+            <a:ext cx="8229600" cy="320040"/>
+          </a:xfrm>
+        </p:spPr>
         <p:txBody>
           <a:bodyPr/>
           <a:lstStyle/>
@@ -845,7 +865,12 @@
             <p:ph type="sldNum" sz="quarter" idx="12"/>
           </p:nvPr>
         </p:nvSpPr>
-        <p:spPr/>
+        <p:spPr>
+          <a:xfrm>
+            <a:off x="10058400" y="6217920"/>
+            <a:ext cx="914400" cy="320040"/>
+          </a:xfrm>
+        </p:spPr>
         <p:txBody>
           <a:bodyPr/>
           <a:lstStyle/>
@@ -1144,7 +1169,12 @@
             <p:ph type="title"/>
           </p:nvPr>
         </p:nvSpPr>
-        <p:spPr/>
+        <p:spPr>
+          <a:xfrm>
+            <a:off x="1371600" y="950976"/>
+            <a:ext cx="9445752" cy="640080"/>
+          </a:xfrm>
+        </p:spPr>
         <p:txBody>
           <a:bodyPr/>
           <a:lstStyle/>
@@ -1169,8 +1199,8 @@
         </p:nvSpPr>
         <p:spPr>
           <a:xfrm>
-            <a:off x="457200" y="1600200"/>
-            <a:ext cx="4038600" cy="4525963"/>
+            <a:off x="1371600" y="1709928"/>
+            <a:ext cx="4572000" cy="4297680"/>
           </a:xfrm>
         </p:spPr>
         <p:txBody>
@@ -1254,8 +1284,8 @@
         </p:nvSpPr>
         <p:spPr>
           <a:xfrm>
-            <a:off x="4648200" y="1600200"/>
-            <a:ext cx="4038600" cy="4525963"/>
+            <a:off x="6217920" y="1709928"/>
+            <a:ext cx="4572000" cy="4297680"/>
           </a:xfrm>
         </p:spPr>
         <p:txBody>
@@ -1360,7 +1390,12 @@
             <p:ph type="ftr" sz="quarter" idx="11"/>
           </p:nvPr>
         </p:nvSpPr>
-        <p:spPr/>
+        <p:spPr>
+          <a:xfrm>
+            <a:off x="1371600" y="6217920"/>
+            <a:ext cx="8229600" cy="320040"/>
+          </a:xfrm>
+        </p:spPr>
         <p:txBody>
           <a:bodyPr/>
           <a:lstStyle/>
@@ -1379,7 +1414,12 @@
             <p:ph type="sldNum" sz="quarter" idx="12"/>
           </p:nvPr>
         </p:nvSpPr>
-        <p:spPr/>
+        <p:spPr>
+          <a:xfrm>
+            <a:off x="10058400" y="6217920"/>
+            <a:ext cx="914400" cy="320040"/>
+          </a:xfrm>
+        </p:spPr>
         <p:txBody>
           <a:bodyPr/>
           <a:lstStyle/>
@@ -3092,7 +3132,7 @@
       <p:grpSpPr/>
       <p:pic>
         <p:nvPicPr>
-          <p:cNvPr id="2" name="Picture 1" descr="VIT_background.png"/>
+          <p:cNvPr id="4" name="Picture 3" descr="VIT_background.png"/>
           <p:cNvPicPr>
             <a:picLocks noChangeAspect="1"/>
           </p:cNvPicPr>
@@ -3116,24 +3156,22 @@
       </p:pic>
       <p:sp>
         <p:nvSpPr>
-          <p:cNvPr id="3" name="TextBox 2"/>
-          <p:cNvSpPr txBox="1"/>
-          <p:nvPr/>
+          <p:cNvPr id="2" name="Title 1"/>
+          <p:cNvSpPr>
+            <a:spLocks noGrp="1"/>
+          </p:cNvSpPr>
+          <p:nvPr>
+            <p:ph type="ctrTitle"/>
+          </p:nvPr>
         </p:nvSpPr>
         <p:spPr>
           <a:xfrm>
             <a:off x="1981199" y="1168400"/>
             <a:ext cx="8229599" cy="438149"/>
           </a:xfrm>
-          <a:prstGeom prst="rect">
-            <a:avLst/>
-          </a:prstGeom>
-          <a:noFill/>
-        </p:spPr>
-        <p:txBody>
-          <a:bodyPr wrap="square" anchor="ctr">
-            <a:spAutoFit/>
-          </a:bodyPr>
+        </p:spPr>
+        <p:txBody>
+          <a:bodyPr wrap="square"/>
           <a:lstStyle/>
           <a:p>
             <a:pPr algn="l">
@@ -3152,49 +3190,28 @@
       </p:sp>
       <p:sp>
         <p:nvSpPr>
-          <p:cNvPr id="4" name="Rounded Rectangle 3"/>
-          <p:cNvSpPr/>
-          <p:nvPr/>
+          <p:cNvPr id="3" name="Subtitle 2"/>
+          <p:cNvSpPr>
+            <a:spLocks noGrp="1"/>
+          </p:cNvSpPr>
+          <p:nvPr>
+            <p:ph type="subTitle" idx="1"/>
+          </p:nvPr>
         </p:nvSpPr>
         <p:spPr>
           <a:xfrm>
             <a:off x="2235199" y="5454650"/>
             <a:ext cx="7721599" cy="330200"/>
           </a:xfrm>
-          <a:prstGeom prst="roundRect">
-            <a:avLst/>
-          </a:prstGeom>
-          <a:solidFill>
-            <a:srgbClr val="FFFFFF"/>
-          </a:solidFill>
-          <a:ln w="19050">
-            <a:solidFill>
-              <a:srgbClr val="2563EB"/>
-            </a:solidFill>
-          </a:ln>
-        </p:spPr>
-        <p:style>
-          <a:lnRef idx="1">
-            <a:schemeClr val="accent1"/>
-          </a:lnRef>
-          <a:fillRef idx="3">
-            <a:schemeClr val="accent1"/>
-          </a:fillRef>
-          <a:effectRef idx="2">
-            <a:schemeClr val="accent1"/>
-          </a:effectRef>
-          <a:fontRef idx="minor">
-            <a:schemeClr val="lt1"/>
-          </a:fontRef>
-        </p:style>
-        <p:txBody>
-          <a:bodyPr rtlCol="0" anchor="ctr" wrap="square"/>
-          <a:lstStyle/>
-          <a:p>
-            <a:pPr algn="ctr">
+        </p:spPr>
+        <p:txBody>
+          <a:bodyPr wrap="square"/>
+          <a:lstStyle/>
+          <a:p>
+            <a:pPr algn="l">
               <a:defRPr sz="3000" b="1">
                 <a:solidFill>
-                  <a:srgbClr val="1E2653"/>
+                  <a:srgbClr val="2563EB"/>
                 </a:solidFill>
                 <a:latin typeface="Segoe UI"/>
               </a:defRPr>
@@ -3203,62 +3220,77 @@
               <a:t>Presented By Prof. Test</a:t>
             </a:r>
           </a:p>
-        </p:txBody>
-      </p:sp>
-      <p:sp>
-        <p:nvSpPr>
-          <p:cNvPr id="5" name="Rounded Rectangle 4"/>
-          <p:cNvSpPr/>
-          <p:nvPr/>
-        </p:nvSpPr>
-        <p:spPr>
-          <a:xfrm>
-            <a:off x="2235199" y="1911350"/>
-            <a:ext cx="7721599" cy="317500"/>
-          </a:xfrm>
-          <a:prstGeom prst="roundRect">
-            <a:avLst/>
-          </a:prstGeom>
-          <a:solidFill>
-            <a:srgbClr val="F8FAFC"/>
-          </a:solidFill>
-          <a:ln w="12700">
-            <a:solidFill>
-              <a:srgbClr val="E2E8F0"/>
-            </a:solidFill>
-          </a:ln>
-        </p:spPr>
-        <p:style>
-          <a:lnRef idx="1">
-            <a:schemeClr val="accent1"/>
-          </a:lnRef>
-          <a:fillRef idx="3">
-            <a:schemeClr val="accent1"/>
-          </a:fillRef>
-          <a:effectRef idx="2">
-            <a:schemeClr val="accent1"/>
-          </a:effectRef>
-          <a:fontRef idx="minor">
-            <a:schemeClr val="lt1"/>
-          </a:fontRef>
-        </p:style>
-        <p:txBody>
-          <a:bodyPr rtlCol="0" anchor="t" wrap="square"/>
-          <a:lstStyle/>
           <a:p>
             <a:pPr algn="l">
-              <a:spcAft>
-                <a:spcPts val="1200"/>
-              </a:spcAft>
-              <a:defRPr sz="3000">
+              <a:defRPr sz="1600">
                 <a:solidFill>
-                  <a:srgbClr val="1E293B"/>
+                  <a:srgbClr val="64748B"/>
                 </a:solidFill>
                 <a:latin typeface="Segoe UI"/>
               </a:defRPr>
             </a:pPr>
             <a:r>
-              <a:t>•  Intro A</a:t>
+              <a:t>VIT Course Material</a:t>
+            </a:r>
+          </a:p>
+        </p:txBody>
+      </p:sp>
+      <p:pic>
+        <p:nvPicPr>
+          <p:cNvPr id="5" name="Picture 4" descr="dpu_logo.png"/>
+          <p:cNvPicPr>
+            <a:picLocks noChangeAspect="1"/>
+          </p:cNvPicPr>
+          <p:nvPr/>
+        </p:nvPicPr>
+        <p:blipFill>
+          <a:blip r:embed="rId3"/>
+          <a:stretch>
+            <a:fillRect/>
+          </a:stretch>
+        </p:blipFill>
+        <p:spPr>
+          <a:xfrm>
+            <a:off x="365760" y="182880"/>
+            <a:ext cx="2926080" cy="731520"/>
+          </a:xfrm>
+          <a:prstGeom prst="rect">
+            <a:avLst/>
+          </a:prstGeom>
+        </p:spPr>
+      </p:pic>
+      <p:sp>
+        <p:nvSpPr>
+          <p:cNvPr id="6" name="Footer Placeholder"/>
+          <p:cNvSpPr txBox="1"/>
+          <p:nvPr/>
+        </p:nvSpPr>
+        <p:spPr>
+          <a:xfrm>
+            <a:off x="1981199" y="5994400"/>
+            <a:ext cx="8229599" cy="285750"/>
+          </a:xfrm>
+          <a:prstGeom prst="rect">
+            <a:avLst/>
+          </a:prstGeom>
+          <a:noFill/>
+        </p:spPr>
+        <p:txBody>
+          <a:bodyPr wrap="square">
+            <a:spAutoFit/>
+          </a:bodyPr>
+          <a:lstStyle/>
+          <a:p>
+            <a:pPr algn="l">
+              <a:defRPr sz="1100">
+                <a:solidFill>
+                  <a:srgbClr val="64748B"/>
+                </a:solidFill>
+                <a:latin typeface="Segoe UI"/>
+              </a:defRPr>
+            </a:pPr>
+            <a:r>
+              <a:t>VIT   •   Slide 1 Cover</a:t>
             </a:r>
           </a:p>
         </p:txBody>
@@ -3283,7 +3315,7 @@
       <p:grpSpPr/>
       <p:pic>
         <p:nvPicPr>
-          <p:cNvPr id="2" name="Picture 1" descr="VIT_background.png"/>
+          <p:cNvPr id="5" name="Picture 4" descr="VIT_background.png"/>
           <p:cNvPicPr>
             <a:picLocks noChangeAspect="1"/>
           </p:cNvPicPr>
@@ -3307,24 +3339,22 @@
       </p:pic>
       <p:sp>
         <p:nvSpPr>
-          <p:cNvPr id="3" name="TextBox 2"/>
-          <p:cNvSpPr txBox="1"/>
-          <p:nvPr/>
+          <p:cNvPr id="2" name="Title 1"/>
+          <p:cNvSpPr>
+            <a:spLocks noGrp="1"/>
+          </p:cNvSpPr>
+          <p:nvPr>
+            <p:ph type="title"/>
+          </p:nvPr>
         </p:nvSpPr>
         <p:spPr>
           <a:xfrm>
             <a:off x="1981199" y="1168400"/>
             <a:ext cx="8229599" cy="438149"/>
           </a:xfrm>
-          <a:prstGeom prst="rect">
-            <a:avLst/>
-          </a:prstGeom>
-          <a:noFill/>
-        </p:spPr>
-        <p:txBody>
-          <a:bodyPr wrap="square" anchor="ctr">
-            <a:spAutoFit/>
-          </a:bodyPr>
+        </p:spPr>
+        <p:txBody>
+          <a:bodyPr wrap="square"/>
           <a:lstStyle/>
           <a:p>
             <a:pPr algn="l">
@@ -3343,60 +3373,123 @@
       </p:sp>
       <p:sp>
         <p:nvSpPr>
-          <p:cNvPr id="4" name="TextBox 3"/>
-          <p:cNvSpPr txBox="1"/>
-          <p:nvPr/>
-        </p:nvSpPr>
-        <p:spPr>
-          <a:xfrm>
-            <a:off x="1981199" y="5994400"/>
-            <a:ext cx="8229599" cy="152400"/>
-          </a:xfrm>
-          <a:prstGeom prst="rect">
-            <a:avLst/>
-          </a:prstGeom>
-          <a:noFill/>
-        </p:spPr>
-        <p:txBody>
-          <a:bodyPr wrap="square">
-            <a:spAutoFit/>
-          </a:bodyPr>
+          <p:cNvPr id="3" name="Content Placeholder 2"/>
+          <p:cNvSpPr>
+            <a:spLocks noGrp="1"/>
+          </p:cNvSpPr>
+          <p:nvPr>
+            <p:ph idx="1" sz="half"/>
+          </p:nvPr>
+        </p:nvSpPr>
+        <p:spPr>
+          <a:xfrm>
+            <a:off x="1981199" y="1784350"/>
+            <a:ext cx="3505199" cy="2159000"/>
+          </a:xfrm>
+        </p:spPr>
+        <p:txBody>
+          <a:bodyPr wrap="square" anchor="t"/>
           <a:lstStyle/>
           <a:p>
             <a:pPr algn="l">
-              <a:defRPr sz="1200">
+              <a:spcAft>
+                <a:spcPts val="1000"/>
+              </a:spcAft>
+              <a:defRPr sz="3000">
                 <a:solidFill>
-                  <a:srgbClr val="64748B"/>
+                  <a:srgbClr val="1E293B"/>
                 </a:solidFill>
                 <a:latin typeface="Segoe UI"/>
               </a:defRPr>
             </a:pPr>
             <a:r>
-              <a:t>VIT   •   Slide 2 Code   •   Slide 2</a:t>
-            </a:r>
-          </a:p>
-        </p:txBody>
-      </p:sp>
-      <p:sp>
-        <p:nvSpPr>
-          <p:cNvPr id="5" name="Rounded Rectangle 4"/>
+              <a:t>•  Refined: Focus on error handling in Pyt</a:t>
+            </a:r>
+          </a:p>
+          <a:p>
+            <a:pPr algn="l">
+              <a:spcAft>
+                <a:spcPts val="1000"/>
+              </a:spcAft>
+              <a:defRPr sz="3000">
+                <a:solidFill>
+                  <a:srgbClr val="1E293B"/>
+                </a:solidFill>
+                <a:latin typeface="Segoe UI"/>
+              </a:defRPr>
+            </a:pPr>
+            <a:r>
+              <a:t>•  Code 2A</a:t>
+            </a:r>
+          </a:p>
+        </p:txBody>
+      </p:sp>
+      <p:sp>
+        <p:nvSpPr>
+          <p:cNvPr id="4" name="Content Placeholder 3"/>
+          <p:cNvSpPr>
+            <a:spLocks noGrp="1"/>
+          </p:cNvSpPr>
+          <p:nvPr>
+            <p:ph idx="2" sz="half"/>
+          </p:nvPr>
+        </p:nvSpPr>
+        <p:spPr>
+          <a:xfrm>
+            <a:off x="5740399" y="1784350"/>
+            <a:ext cx="4470399" cy="2159000"/>
+          </a:xfrm>
+        </p:spPr>
+        <p:txBody>
+          <a:bodyPr/>
+          <a:lstStyle/>
+          <a:p/>
+        </p:txBody>
+      </p:sp>
+      <p:pic>
+        <p:nvPicPr>
+          <p:cNvPr id="6" name="Picture 5" descr="dpu_logo.png"/>
+          <p:cNvPicPr>
+            <a:picLocks noChangeAspect="1"/>
+          </p:cNvPicPr>
+          <p:nvPr/>
+        </p:nvPicPr>
+        <p:blipFill>
+          <a:blip r:embed="rId3"/>
+          <a:stretch>
+            <a:fillRect/>
+          </a:stretch>
+        </p:blipFill>
+        <p:spPr>
+          <a:xfrm>
+            <a:off x="365760" y="182880"/>
+            <a:ext cx="2926080" cy="731520"/>
+          </a:xfrm>
+          <a:prstGeom prst="rect">
+            <a:avLst/>
+          </a:prstGeom>
+        </p:spPr>
+      </p:pic>
+      <p:sp>
+        <p:nvSpPr>
+          <p:cNvPr id="7" name="Rounded Rectangle 6"/>
           <p:cNvSpPr/>
           <p:nvPr/>
         </p:nvSpPr>
         <p:spPr>
           <a:xfrm>
-            <a:off x="1981199" y="1784350"/>
-            <a:ext cx="3505199" cy="2159000"/>
+            <a:off x="5740399" y="1784350"/>
+            <a:ext cx="4470399" cy="2159000"/>
           </a:xfrm>
           <a:prstGeom prst="roundRect">
             <a:avLst/>
           </a:prstGeom>
           <a:solidFill>
-            <a:srgbClr val="F8FAFC"/>
+            <a:srgbClr val="0F172A"/>
           </a:solidFill>
-          <a:ln w="12700">
+          <a:ln w="19050">
             <a:solidFill>
-              <a:srgbClr val="E2E8F0"/>
+              <a:srgbClr val="2563EB"/>
             </a:solidFill>
           </a:ln>
         </p:spPr>
@@ -3415,88 +3508,14 @@
           </a:fontRef>
         </p:style>
         <p:txBody>
-          <a:bodyPr rtlCol="0" anchor="t" wrap="square"/>
-          <a:lstStyle/>
-          <a:p>
-            <a:pPr algn="l">
-              <a:spcAft>
-                <a:spcPts val="1200"/>
-              </a:spcAft>
-              <a:defRPr sz="3000">
-                <a:solidFill>
-                  <a:srgbClr val="1E293B"/>
-                </a:solidFill>
-                <a:latin typeface="Segoe UI"/>
-              </a:defRPr>
-            </a:pPr>
-            <a:r>
-              <a:t>•  Refined: Focus on error handling in Pyt</a:t>
-            </a:r>
-          </a:p>
-          <a:p>
-            <a:pPr algn="l">
-              <a:spcAft>
-                <a:spcPts val="1200"/>
-              </a:spcAft>
-              <a:defRPr sz="3000">
-                <a:solidFill>
-                  <a:srgbClr val="1E293B"/>
-                </a:solidFill>
-                <a:latin typeface="Segoe UI"/>
-              </a:defRPr>
-            </a:pPr>
-            <a:r>
-              <a:t>•  Code 2A</a:t>
-            </a:r>
-          </a:p>
-        </p:txBody>
-      </p:sp>
-      <p:sp>
-        <p:nvSpPr>
-          <p:cNvPr id="6" name="Rounded Rectangle 5"/>
-          <p:cNvSpPr/>
-          <p:nvPr/>
-        </p:nvSpPr>
-        <p:spPr>
-          <a:xfrm>
-            <a:off x="5740399" y="1784350"/>
-            <a:ext cx="4470399" cy="2159000"/>
-          </a:xfrm>
-          <a:prstGeom prst="roundRect">
-            <a:avLst/>
-          </a:prstGeom>
-          <a:solidFill>
-            <a:srgbClr val="0F172A"/>
-          </a:solidFill>
-          <a:ln w="12700">
-            <a:solidFill>
-              <a:srgbClr val="1E293B"/>
-            </a:solidFill>
-          </a:ln>
-        </p:spPr>
-        <p:style>
-          <a:lnRef idx="1">
-            <a:schemeClr val="accent1"/>
-          </a:lnRef>
-          <a:fillRef idx="3">
-            <a:schemeClr val="accent1"/>
-          </a:fillRef>
-          <a:effectRef idx="2">
-            <a:schemeClr val="accent1"/>
-          </a:effectRef>
-          <a:fontRef idx="minor">
-            <a:schemeClr val="lt1"/>
-          </a:fontRef>
-        </p:style>
-        <p:txBody>
-          <a:bodyPr rtlCol="0" anchor="t" wrap="square"/>
+          <a:bodyPr rtlCol="0" anchor="t" wrap="none"/>
           <a:lstStyle/>
           <a:p>
             <a:pPr algn="ctr">
               <a:spcAft>
-                <a:spcPts val="800"/>
+                <a:spcPts val="600"/>
               </a:spcAft>
-              <a:defRPr sz="1200">
+              <a:defRPr sz="1400">
                 <a:solidFill>
                   <a:srgbClr val="60A5FA"/>
                 </a:solidFill>
@@ -3504,7 +3523,7 @@
               </a:defRPr>
             </a:pPr>
             <a:r>
-              <a:t>// Language: PLAINTEXT</a:t>
+              <a:t>// PLAINTEXT</a:t>
             </a:r>
           </a:p>
           <a:p>
@@ -3512,19 +3531,18 @@
               <a:spcAft>
                 <a:spcPts val="200"/>
               </a:spcAft>
-              <a:defRPr sz="2000">
+              <a:defRPr sz="1400">
                 <a:latin typeface="Consolas"/>
               </a:defRPr>
             </a:pPr>
             <a:r>
-              <a:rPr sz="2000">
+              <a:rPr sz="1400">
                 <a:solidFill>
                   <a:srgbClr val="F0F4FA"/>
                 </a:solidFill>
                 <a:latin typeface="Consolas"/>
               </a:rPr>
-              <a:t># Updated: Focus on error handling in Python
-</a:t>
+              <a:t># Updated: Focus on error handling in Python</a:t>
             </a:r>
           </a:p>
           <a:p>
@@ -3532,19 +3550,54 @@
               <a:spcAft>
                 <a:spcPts val="200"/>
               </a:spcAft>
-              <a:defRPr sz="2000">
+              <a:defRPr sz="1400">
                 <a:latin typeface="Consolas"/>
               </a:defRPr>
             </a:pPr>
             <a:r>
-              <a:rPr sz="2000">
+              <a:rPr sz="1400">
                 <a:solidFill>
                   <a:srgbClr val="F0F4FA"/>
                 </a:solidFill>
                 <a:latin typeface="Consolas"/>
               </a:rPr>
-              <a:t>print('Original 2')
-</a:t>
+              <a:t>print('Original 2')</a:t>
+            </a:r>
+          </a:p>
+        </p:txBody>
+      </p:sp>
+      <p:sp>
+        <p:nvSpPr>
+          <p:cNvPr id="8" name="Footer Placeholder"/>
+          <p:cNvSpPr txBox="1"/>
+          <p:nvPr/>
+        </p:nvSpPr>
+        <p:spPr>
+          <a:xfrm>
+            <a:off x="1981199" y="5994400"/>
+            <a:ext cx="8229599" cy="152400"/>
+          </a:xfrm>
+          <a:prstGeom prst="rect">
+            <a:avLst/>
+          </a:prstGeom>
+          <a:noFill/>
+        </p:spPr>
+        <p:txBody>
+          <a:bodyPr wrap="square">
+            <a:spAutoFit/>
+          </a:bodyPr>
+          <a:lstStyle/>
+          <a:p>
+            <a:pPr algn="l">
+              <a:defRPr sz="1100">
+                <a:solidFill>
+                  <a:srgbClr val="64748B"/>
+                </a:solidFill>
+                <a:latin typeface="Segoe UI"/>
+              </a:defRPr>
+            </a:pPr>
+            <a:r>
+              <a:t>VIT   •   Slide 2 Code</a:t>
             </a:r>
           </a:p>
         </p:txBody>
@@ -3569,7 +3622,7 @@
       <p:grpSpPr/>
       <p:pic>
         <p:nvPicPr>
-          <p:cNvPr id="2" name="Picture 1" descr="VIT_background.png"/>
+          <p:cNvPr id="4" name="Picture 3" descr="VIT_background.png"/>
           <p:cNvPicPr>
             <a:picLocks noChangeAspect="1"/>
           </p:cNvPicPr>
@@ -3593,24 +3646,22 @@
       </p:pic>
       <p:sp>
         <p:nvSpPr>
-          <p:cNvPr id="3" name="TextBox 2"/>
-          <p:cNvSpPr txBox="1"/>
-          <p:nvPr/>
+          <p:cNvPr id="2" name="Title 1"/>
+          <p:cNvSpPr>
+            <a:spLocks noGrp="1"/>
+          </p:cNvSpPr>
+          <p:nvPr>
+            <p:ph type="title"/>
+          </p:nvPr>
         </p:nvSpPr>
         <p:spPr>
           <a:xfrm>
             <a:off x="1981199" y="1168400"/>
             <a:ext cx="8229599" cy="438149"/>
           </a:xfrm>
-          <a:prstGeom prst="rect">
-            <a:avLst/>
-          </a:prstGeom>
-          <a:noFill/>
-        </p:spPr>
-        <p:txBody>
-          <a:bodyPr wrap="square" anchor="ctr">
-            <a:spAutoFit/>
-          </a:bodyPr>
+        </p:spPr>
+        <p:txBody>
+          <a:bodyPr wrap="square"/>
           <a:lstStyle/>
           <a:p>
             <a:pPr algn="l">
@@ -3629,84 +3680,27 @@
       </p:sp>
       <p:sp>
         <p:nvSpPr>
-          <p:cNvPr id="4" name="TextBox 3"/>
-          <p:cNvSpPr txBox="1"/>
-          <p:nvPr/>
-        </p:nvSpPr>
-        <p:spPr>
-          <a:xfrm>
-            <a:off x="1981199" y="5994400"/>
-            <a:ext cx="8229599" cy="152400"/>
-          </a:xfrm>
-          <a:prstGeom prst="rect">
-            <a:avLst/>
-          </a:prstGeom>
-          <a:noFill/>
-        </p:spPr>
-        <p:txBody>
-          <a:bodyPr wrap="square">
-            <a:spAutoFit/>
-          </a:bodyPr>
-          <a:lstStyle/>
-          <a:p>
-            <a:pPr algn="l">
-              <a:defRPr sz="1200">
-                <a:solidFill>
-                  <a:srgbClr val="64748B"/>
-                </a:solidFill>
-                <a:latin typeface="Segoe UI"/>
-              </a:defRPr>
-            </a:pPr>
-            <a:r>
-              <a:t>VIT   •   Slide 3 Closing   •   Slide 3</a:t>
-            </a:r>
-          </a:p>
-        </p:txBody>
-      </p:sp>
-      <p:sp>
-        <p:nvSpPr>
-          <p:cNvPr id="5" name="Rounded Rectangle 4"/>
-          <p:cNvSpPr/>
-          <p:nvPr/>
+          <p:cNvPr id="3" name="Content Placeholder 2"/>
+          <p:cNvSpPr>
+            <a:spLocks noGrp="1"/>
+          </p:cNvSpPr>
+          <p:nvPr>
+            <p:ph idx="1"/>
+          </p:nvPr>
         </p:nvSpPr>
         <p:spPr>
           <a:xfrm>
             <a:off x="2171699" y="1847849"/>
             <a:ext cx="7848599" cy="380999"/>
           </a:xfrm>
-          <a:prstGeom prst="roundRect">
-            <a:avLst/>
-          </a:prstGeom>
-          <a:solidFill>
-            <a:srgbClr val="F8FAFC"/>
-          </a:solidFill>
-          <a:ln w="12700">
-            <a:solidFill>
-              <a:srgbClr val="E2E8F0"/>
-            </a:solidFill>
-          </a:ln>
-        </p:spPr>
-        <p:style>
-          <a:lnRef idx="1">
-            <a:schemeClr val="accent1"/>
-          </a:lnRef>
-          <a:fillRef idx="3">
-            <a:schemeClr val="accent1"/>
-          </a:fillRef>
-          <a:effectRef idx="2">
-            <a:schemeClr val="accent1"/>
-          </a:effectRef>
-          <a:fontRef idx="minor">
-            <a:schemeClr val="lt1"/>
-          </a:fontRef>
-        </p:style>
-        <p:txBody>
-          <a:bodyPr rtlCol="0" anchor="t" wrap="square"/>
+        </p:spPr>
+        <p:txBody>
+          <a:bodyPr wrap="square" anchor="t"/>
           <a:lstStyle/>
           <a:p>
             <a:pPr algn="l">
               <a:spcAft>
-                <a:spcPts val="1200"/>
+                <a:spcPts val="1000"/>
               </a:spcAft>
               <a:defRPr sz="3000">
                 <a:solidFill>
@@ -3717,6 +3711,66 @@
             </a:pPr>
             <a:r>
               <a:t>•  Conclusion 3</a:t>
+            </a:r>
+          </a:p>
+        </p:txBody>
+      </p:sp>
+      <p:pic>
+        <p:nvPicPr>
+          <p:cNvPr id="5" name="Picture 4" descr="dpu_logo.png"/>
+          <p:cNvPicPr>
+            <a:picLocks noChangeAspect="1"/>
+          </p:cNvPicPr>
+          <p:nvPr/>
+        </p:nvPicPr>
+        <p:blipFill>
+          <a:blip r:embed="rId3"/>
+          <a:stretch>
+            <a:fillRect/>
+          </a:stretch>
+        </p:blipFill>
+        <p:spPr>
+          <a:xfrm>
+            <a:off x="365760" y="182880"/>
+            <a:ext cx="2926080" cy="731520"/>
+          </a:xfrm>
+          <a:prstGeom prst="rect">
+            <a:avLst/>
+          </a:prstGeom>
+        </p:spPr>
+      </p:pic>
+      <p:sp>
+        <p:nvSpPr>
+          <p:cNvPr id="6" name="Footer Placeholder"/>
+          <p:cNvSpPr txBox="1"/>
+          <p:nvPr/>
+        </p:nvSpPr>
+        <p:spPr>
+          <a:xfrm>
+            <a:off x="1981199" y="5994400"/>
+            <a:ext cx="8229599" cy="152400"/>
+          </a:xfrm>
+          <a:prstGeom prst="rect">
+            <a:avLst/>
+          </a:prstGeom>
+          <a:noFill/>
+        </p:spPr>
+        <p:txBody>
+          <a:bodyPr wrap="square">
+            <a:spAutoFit/>
+          </a:bodyPr>
+          <a:lstStyle/>
+          <a:p>
+            <a:pPr algn="l">
+              <a:defRPr sz="1100">
+                <a:solidFill>
+                  <a:srgbClr val="64748B"/>
+                </a:solidFill>
+                <a:latin typeface="Segoe UI"/>
+              </a:defRPr>
+            </a:pPr>
+            <a:r>
+              <a:t>VIT   •   Slide 3 Closing</a:t>
             </a:r>
           </a:p>
         </p:txBody>
